--- a/ENSA_Module_10.pptx
+++ b/ENSA_Module_10.pptx
@@ -260,165 +260,31 @@
 </p:cmAuthorLst>
 </file>
 
-<file path=ppt/revisionInfo.xml><?xml version="1.0" encoding="utf-8"?>
-<p1510:revInfo xmlns:a="http://schemas.openxmlformats.org/drawingml/2006/main" xmlns:r="http://schemas.openxmlformats.org/officeDocument/2006/relationships" xmlns:p1510="http://schemas.microsoft.com/office/powerpoint/2015/10/main">
-  <p1510:revLst>
-    <p1510:client id="{AFDD5DE5-FBAD-9845-B549-F5E4BBFD049E}" v="8" dt="2025-10-22T05:13:49.646"/>
-  </p1510:revLst>
-</p1510:revInfo>
-</file>
-
 <file path=ppt/changesInfos/changesInfo1.xml><?xml version="1.0" encoding="utf-8"?>
 <pc:chgInfo xmlns:a="http://schemas.openxmlformats.org/drawingml/2006/main" xmlns:r="http://schemas.openxmlformats.org/officeDocument/2006/relationships" xmlns:ac="http://schemas.microsoft.com/office/drawing/2013/main/command" xmlns:pc="http://schemas.microsoft.com/office/powerpoint/2013/main/command">
   <pc:docChgLst>
-    <pc:chgData name="Július Baráth" userId="e650c4ab-697e-4750-bd58-c1531aabce95" providerId="ADAL" clId="{8709A54A-5FED-3F47-96BF-819198175BFD}"/>
+    <pc:chgData name="Baráth, Július" userId="aebde9b9-dccc-4475-a9ac-c05e78323d7a" providerId="ADAL" clId="{4A0811C8-ED2F-505E-B787-C8270CED5046}"/>
     <pc:docChg chg="custSel modSld">
-      <pc:chgData name="Július Baráth" userId="e650c4ab-697e-4750-bd58-c1531aabce95" providerId="ADAL" clId="{8709A54A-5FED-3F47-96BF-819198175BFD}" dt="2020-10-08T12:52:06.454" v="29" actId="27636"/>
+      <pc:chgData name="Baráth, Július" userId="aebde9b9-dccc-4475-a9ac-c05e78323d7a" providerId="ADAL" clId="{4A0811C8-ED2F-505E-B787-C8270CED5046}" dt="2026-10-20T11:03:17.989" v="105" actId="114"/>
       <pc:docMkLst>
         <pc:docMk/>
       </pc:docMkLst>
-      <pc:sldChg chg="modSp mod">
-        <pc:chgData name="Július Baráth" userId="e650c4ab-697e-4750-bd58-c1531aabce95" providerId="ADAL" clId="{8709A54A-5FED-3F47-96BF-819198175BFD}" dt="2020-10-08T12:04:56.861" v="0" actId="115"/>
-        <pc:sldMkLst>
-          <pc:docMk/>
-          <pc:sldMk cId="3943937825" sldId="1108"/>
-        </pc:sldMkLst>
-      </pc:sldChg>
-      <pc:sldChg chg="modSp mod">
-        <pc:chgData name="Július Baráth" userId="e650c4ab-697e-4750-bd58-c1531aabce95" providerId="ADAL" clId="{8709A54A-5FED-3F47-96BF-819198175BFD}" dt="2020-10-08T12:07:00.525" v="1" actId="115"/>
-        <pc:sldMkLst>
-          <pc:docMk/>
-          <pc:sldMk cId="1741508343" sldId="1423"/>
-        </pc:sldMkLst>
-      </pc:sldChg>
-      <pc:sldChg chg="modSp mod">
-        <pc:chgData name="Július Baráth" userId="e650c4ab-697e-4750-bd58-c1531aabce95" providerId="ADAL" clId="{8709A54A-5FED-3F47-96BF-819198175BFD}" dt="2020-10-08T12:09:15.549" v="2" actId="115"/>
-        <pc:sldMkLst>
-          <pc:docMk/>
-          <pc:sldMk cId="1995151817" sldId="1427"/>
-        </pc:sldMkLst>
-      </pc:sldChg>
-      <pc:sldChg chg="modSp mod">
-        <pc:chgData name="Július Baráth" userId="e650c4ab-697e-4750-bd58-c1531aabce95" providerId="ADAL" clId="{8709A54A-5FED-3F47-96BF-819198175BFD}" dt="2020-10-08T12:52:06.454" v="29" actId="27636"/>
-        <pc:sldMkLst>
-          <pc:docMk/>
-          <pc:sldMk cId="2204140661" sldId="1452"/>
-        </pc:sldMkLst>
-      </pc:sldChg>
-    </pc:docChg>
-  </pc:docChgLst>
-  <pc:docChgLst>
-    <pc:chgData name="Baráth, Július" userId="aebde9b9-dccc-4475-a9ac-c05e78323d7a" providerId="ADAL" clId="{8564C235-8DFD-4B48-BE3C-2C89C507ED1B}"/>
-    <pc:docChg chg="undo custSel addSld delSld modSld">
-      <pc:chgData name="Baráth, Július" userId="aebde9b9-dccc-4475-a9ac-c05e78323d7a" providerId="ADAL" clId="{8564C235-8DFD-4B48-BE3C-2C89C507ED1B}" dt="2024-10-23T07:04:35.401" v="21" actId="1076"/>
-      <pc:docMkLst>
-        <pc:docMk/>
-      </pc:docMkLst>
-      <pc:sldChg chg="modSp mod">
-        <pc:chgData name="Baráth, Július" userId="aebde9b9-dccc-4475-a9ac-c05e78323d7a" providerId="ADAL" clId="{8564C235-8DFD-4B48-BE3C-2C89C507ED1B}" dt="2024-10-23T06:37:35.291" v="16" actId="20577"/>
-        <pc:sldMkLst>
-          <pc:docMk/>
-          <pc:sldMk cId="4215459012" sldId="1189"/>
-        </pc:sldMkLst>
-      </pc:sldChg>
-      <pc:sldChg chg="addSp modSp new">
-        <pc:chgData name="Baráth, Július" userId="aebde9b9-dccc-4475-a9ac-c05e78323d7a" providerId="ADAL" clId="{8564C235-8DFD-4B48-BE3C-2C89C507ED1B}" dt="2024-10-23T07:04:35.401" v="21" actId="1076"/>
-        <pc:sldMkLst>
-          <pc:docMk/>
-          <pc:sldMk cId="100293398" sldId="1481"/>
-        </pc:sldMkLst>
-      </pc:sldChg>
-      <pc:sldChg chg="new del">
-        <pc:chgData name="Baráth, Július" userId="aebde9b9-dccc-4475-a9ac-c05e78323d7a" providerId="ADAL" clId="{8564C235-8DFD-4B48-BE3C-2C89C507ED1B}" dt="2024-10-23T07:04:11.582" v="18" actId="680"/>
-        <pc:sldMkLst>
-          <pc:docMk/>
-          <pc:sldMk cId="351824257" sldId="1481"/>
-        </pc:sldMkLst>
-      </pc:sldChg>
-    </pc:docChg>
-  </pc:docChgLst>
-  <pc:docChgLst>
-    <pc:chgData name="Baráth, Július" userId="aebde9b9-dccc-4475-a9ac-c05e78323d7a" providerId="ADAL" clId="{DA95EE0C-752B-F640-A8F0-58C0CCACEC8B}"/>
-    <pc:docChg chg="undo custSel addSld modSld">
-      <pc:chgData name="Baráth, Július" userId="aebde9b9-dccc-4475-a9ac-c05e78323d7a" providerId="ADAL" clId="{DA95EE0C-752B-F640-A8F0-58C0CCACEC8B}" dt="2024-10-28T09:30:42.775" v="92" actId="108"/>
-      <pc:docMkLst>
-        <pc:docMk/>
-      </pc:docMkLst>
-      <pc:sldChg chg="addSp modSp mod">
-        <pc:chgData name="Baráth, Július" userId="aebde9b9-dccc-4475-a9ac-c05e78323d7a" providerId="ADAL" clId="{DA95EE0C-752B-F640-A8F0-58C0CCACEC8B}" dt="2024-10-28T09:30:42.775" v="92" actId="108"/>
-        <pc:sldMkLst>
-          <pc:docMk/>
-          <pc:sldMk cId="1073792699" sldId="342"/>
-        </pc:sldMkLst>
-      </pc:sldChg>
-      <pc:sldChg chg="modSp mod">
-        <pc:chgData name="Baráth, Július" userId="aebde9b9-dccc-4475-a9ac-c05e78323d7a" providerId="ADAL" clId="{DA95EE0C-752B-F640-A8F0-58C0CCACEC8B}" dt="2024-10-21T11:06:54.019" v="52" actId="20577"/>
-        <pc:sldMkLst>
-          <pc:docMk/>
-          <pc:sldMk cId="4215459012" sldId="1189"/>
-        </pc:sldMkLst>
-      </pc:sldChg>
-      <pc:sldChg chg="addSp delSp modSp new">
-        <pc:chgData name="Baráth, Július" userId="aebde9b9-dccc-4475-a9ac-c05e78323d7a" providerId="ADAL" clId="{DA95EE0C-752B-F640-A8F0-58C0CCACEC8B}" dt="2024-10-03T11:29:20.677" v="3"/>
-        <pc:sldMkLst>
-          <pc:docMk/>
-          <pc:sldMk cId="3761427796" sldId="1478"/>
-        </pc:sldMkLst>
-      </pc:sldChg>
-      <pc:sldChg chg="addSp delSp modSp new mod">
-        <pc:chgData name="Baráth, Július" userId="aebde9b9-dccc-4475-a9ac-c05e78323d7a" providerId="ADAL" clId="{DA95EE0C-752B-F640-A8F0-58C0CCACEC8B}" dt="2024-10-03T11:32:12.145" v="12" actId="14100"/>
-        <pc:sldMkLst>
-          <pc:docMk/>
-          <pc:sldMk cId="289004660" sldId="1479"/>
-        </pc:sldMkLst>
-      </pc:sldChg>
-      <pc:sldChg chg="addSp delSp modSp new">
-        <pc:chgData name="Baráth, Július" userId="aebde9b9-dccc-4475-a9ac-c05e78323d7a" providerId="ADAL" clId="{DA95EE0C-752B-F640-A8F0-58C0CCACEC8B}" dt="2024-10-03T11:33:46.288" v="16"/>
-        <pc:sldMkLst>
-          <pc:docMk/>
-          <pc:sldMk cId="1729902385" sldId="1480"/>
-        </pc:sldMkLst>
-      </pc:sldChg>
-    </pc:docChg>
-  </pc:docChgLst>
-  <pc:docChgLst>
-    <pc:chgData name="Baráth, Július" userId="aebde9b9-dccc-4475-a9ac-c05e78323d7a" providerId="ADAL" clId="{4A0811C8-ED2F-505E-B787-C8270CED5046}"/>
-    <pc:docChg chg="custSel modSld">
-      <pc:chgData name="Baráth, Július" userId="aebde9b9-dccc-4475-a9ac-c05e78323d7a" providerId="ADAL" clId="{4A0811C8-ED2F-505E-B787-C8270CED5046}" dt="2025-10-22T05:13:58.677" v="85" actId="404"/>
-      <pc:docMkLst>
-        <pc:docMk/>
-      </pc:docMkLst>
-      <pc:sldChg chg="modSp mod">
-        <pc:chgData name="Baráth, Július" userId="aebde9b9-dccc-4475-a9ac-c05e78323d7a" providerId="ADAL" clId="{4A0811C8-ED2F-505E-B787-C8270CED5046}" dt="2025-10-22T05:13:58.677" v="85" actId="404"/>
-        <pc:sldMkLst>
-          <pc:docMk/>
-          <pc:sldMk cId="1989389863" sldId="876"/>
-        </pc:sldMkLst>
-        <pc:spChg chg="mod">
-          <ac:chgData name="Baráth, Július" userId="aebde9b9-dccc-4475-a9ac-c05e78323d7a" providerId="ADAL" clId="{4A0811C8-ED2F-505E-B787-C8270CED5046}" dt="2025-10-22T05:13:58.677" v="85" actId="404"/>
-          <ac:spMkLst>
-            <pc:docMk/>
-            <pc:sldMk cId="1989389863" sldId="876"/>
-            <ac:spMk id="6" creationId="{00000000-0000-0000-0000-000000000000}"/>
-          </ac:spMkLst>
-        </pc:spChg>
-      </pc:sldChg>
-      <pc:sldChg chg="modSp mod">
-        <pc:chgData name="Baráth, Július" userId="aebde9b9-dccc-4475-a9ac-c05e78323d7a" providerId="ADAL" clId="{4A0811C8-ED2F-505E-B787-C8270CED5046}" dt="2025-10-21T08:13:32.955" v="14" actId="20577"/>
+      <pc:sldChg chg="delSp modSp mod">
+        <pc:chgData name="Baráth, Július" userId="aebde9b9-dccc-4475-a9ac-c05e78323d7a" providerId="ADAL" clId="{4A0811C8-ED2F-505E-B787-C8270CED5046}" dt="2026-10-20T11:00:36.194" v="93" actId="478"/>
         <pc:sldMkLst>
           <pc:docMk/>
           <pc:sldMk cId="4215459012" sldId="1189"/>
         </pc:sldMkLst>
         <pc:spChg chg="mod">
-          <ac:chgData name="Baráth, Július" userId="aebde9b9-dccc-4475-a9ac-c05e78323d7a" providerId="ADAL" clId="{4A0811C8-ED2F-505E-B787-C8270CED5046}" dt="2025-10-21T08:13:32.955" v="14" actId="20577"/>
+          <ac:chgData name="Baráth, Július" userId="aebde9b9-dccc-4475-a9ac-c05e78323d7a" providerId="ADAL" clId="{4A0811C8-ED2F-505E-B787-C8270CED5046}" dt="2026-10-20T11:00:19.168" v="92" actId="20577"/>
           <ac:spMkLst>
             <pc:docMk/>
             <pc:sldMk cId="4215459012" sldId="1189"/>
             <ac:spMk id="2" creationId="{D4E0E298-6AA9-ED49-B5A7-F4C6C51BC65B}"/>
           </ac:spMkLst>
         </pc:spChg>
-        <pc:spChg chg="mod">
-          <ac:chgData name="Baráth, Július" userId="aebde9b9-dccc-4475-a9ac-c05e78323d7a" providerId="ADAL" clId="{4A0811C8-ED2F-505E-B787-C8270CED5046}" dt="2025-10-21T08:12:52.663" v="10" actId="20577"/>
+        <pc:spChg chg="del">
+          <ac:chgData name="Baráth, Július" userId="aebde9b9-dccc-4475-a9ac-c05e78323d7a" providerId="ADAL" clId="{4A0811C8-ED2F-505E-B787-C8270CED5046}" dt="2026-10-20T11:00:36.194" v="93" actId="478"/>
           <ac:spMkLst>
             <pc:docMk/>
             <pc:sldMk cId="4215459012" sldId="1189"/>
@@ -426,517 +292,20 @@
           </ac:spMkLst>
         </pc:spChg>
       </pc:sldChg>
-      <pc:sldChg chg="addSp modSp mod">
-        <pc:chgData name="Baráth, Július" userId="aebde9b9-dccc-4475-a9ac-c05e78323d7a" providerId="ADAL" clId="{4A0811C8-ED2F-505E-B787-C8270CED5046}" dt="2025-10-21T09:14:12.236" v="37" actId="1076"/>
-        <pc:sldMkLst>
-          <pc:docMk/>
-          <pc:sldMk cId="262308121" sldId="1277"/>
-        </pc:sldMkLst>
-        <pc:spChg chg="add mod">
-          <ac:chgData name="Baráth, Július" userId="aebde9b9-dccc-4475-a9ac-c05e78323d7a" providerId="ADAL" clId="{4A0811C8-ED2F-505E-B787-C8270CED5046}" dt="2025-10-21T09:14:12.236" v="37" actId="1076"/>
-          <ac:spMkLst>
-            <pc:docMk/>
-            <pc:sldMk cId="262308121" sldId="1277"/>
-            <ac:spMk id="4" creationId="{FA6C6F90-9B40-75F3-6B0C-6D2DA81A4733}"/>
-          </ac:spMkLst>
-        </pc:spChg>
-      </pc:sldChg>
-      <pc:sldChg chg="addSp modSp mod">
-        <pc:chgData name="Baráth, Július" userId="aebde9b9-dccc-4475-a9ac-c05e78323d7a" providerId="ADAL" clId="{4A0811C8-ED2F-505E-B787-C8270CED5046}" dt="2025-10-21T08:08:34.405" v="8" actId="20577"/>
-        <pc:sldMkLst>
-          <pc:docMk/>
-          <pc:sldMk cId="4124003915" sldId="1424"/>
-        </pc:sldMkLst>
-        <pc:spChg chg="add mod">
-          <ac:chgData name="Baráth, Július" userId="aebde9b9-dccc-4475-a9ac-c05e78323d7a" providerId="ADAL" clId="{4A0811C8-ED2F-505E-B787-C8270CED5046}" dt="2025-10-21T08:08:34.405" v="8" actId="20577"/>
-          <ac:spMkLst>
-            <pc:docMk/>
-            <pc:sldMk cId="4124003915" sldId="1424"/>
-            <ac:spMk id="2" creationId="{E46F3B01-1ACC-2EF1-F4FA-FA46A4D2DC32}"/>
-          </ac:spMkLst>
-        </pc:spChg>
-      </pc:sldChg>
       <pc:sldChg chg="modSp mod">
-        <pc:chgData name="Baráth, Július" userId="aebde9b9-dccc-4475-a9ac-c05e78323d7a" providerId="ADAL" clId="{4A0811C8-ED2F-505E-B787-C8270CED5046}" dt="2025-10-21T09:09:43.434" v="18" actId="115"/>
-        <pc:sldMkLst>
-          <pc:docMk/>
-          <pc:sldMk cId="818019005" sldId="1442"/>
-        </pc:sldMkLst>
-        <pc:spChg chg="mod">
-          <ac:chgData name="Baráth, Július" userId="aebde9b9-dccc-4475-a9ac-c05e78323d7a" providerId="ADAL" clId="{4A0811C8-ED2F-505E-B787-C8270CED5046}" dt="2025-10-21T09:09:43.434" v="18" actId="115"/>
-          <ac:spMkLst>
-            <pc:docMk/>
-            <pc:sldMk cId="818019005" sldId="1442"/>
-            <ac:spMk id="11" creationId="{EAA457B6-BF0E-3940-9652-1A2AD9C094CF}"/>
-          </ac:spMkLst>
-        </pc:spChg>
-      </pc:sldChg>
-      <pc:sldChg chg="addSp modSp mod">
-        <pc:chgData name="Baráth, Július" userId="aebde9b9-dccc-4475-a9ac-c05e78323d7a" providerId="ADAL" clId="{4A0811C8-ED2F-505E-B787-C8270CED5046}" dt="2025-10-21T09:21:04.010" v="46" actId="20577"/>
-        <pc:sldMkLst>
-          <pc:docMk/>
-          <pc:sldMk cId="2204140661" sldId="1452"/>
-        </pc:sldMkLst>
-        <pc:spChg chg="add mod">
-          <ac:chgData name="Baráth, Július" userId="aebde9b9-dccc-4475-a9ac-c05e78323d7a" providerId="ADAL" clId="{4A0811C8-ED2F-505E-B787-C8270CED5046}" dt="2025-10-21T09:20:03.119" v="41" actId="1076"/>
-          <ac:spMkLst>
-            <pc:docMk/>
-            <pc:sldMk cId="2204140661" sldId="1452"/>
-            <ac:spMk id="2" creationId="{0AB5EC8E-76C4-415D-938D-FE1469A9D5B4}"/>
-          </ac:spMkLst>
-        </pc:spChg>
-        <pc:spChg chg="mod">
-          <ac:chgData name="Baráth, Július" userId="aebde9b9-dccc-4475-a9ac-c05e78323d7a" providerId="ADAL" clId="{4A0811C8-ED2F-505E-B787-C8270CED5046}" dt="2025-10-21T09:21:04.010" v="46" actId="20577"/>
-          <ac:spMkLst>
-            <pc:docMk/>
-            <pc:sldMk cId="2204140661" sldId="1452"/>
-            <ac:spMk id="5" creationId="{654AD627-46F6-374D-A9FD-131CEDA2C9FC}"/>
-          </ac:spMkLst>
-        </pc:spChg>
-      </pc:sldChg>
-      <pc:sldChg chg="modSp mod">
-        <pc:chgData name="Baráth, Július" userId="aebde9b9-dccc-4475-a9ac-c05e78323d7a" providerId="ADAL" clId="{4A0811C8-ED2F-505E-B787-C8270CED5046}" dt="2025-10-21T09:34:22.512" v="60" actId="6549"/>
-        <pc:sldMkLst>
-          <pc:docMk/>
-          <pc:sldMk cId="61973735" sldId="1463"/>
-        </pc:sldMkLst>
-        <pc:spChg chg="mod">
-          <ac:chgData name="Baráth, Július" userId="aebde9b9-dccc-4475-a9ac-c05e78323d7a" providerId="ADAL" clId="{4A0811C8-ED2F-505E-B787-C8270CED5046}" dt="2025-10-21T09:34:22.512" v="60" actId="6549"/>
-          <ac:spMkLst>
-            <pc:docMk/>
-            <pc:sldMk cId="61973735" sldId="1463"/>
-            <ac:spMk id="6" creationId="{7D00FBAB-9A89-6F40-95D1-264538B637DA}"/>
-          </ac:spMkLst>
-        </pc:spChg>
-      </pc:sldChg>
-      <pc:sldChg chg="modSp mod">
-        <pc:chgData name="Baráth, Július" userId="aebde9b9-dccc-4475-a9ac-c05e78323d7a" providerId="ADAL" clId="{4A0811C8-ED2F-505E-B787-C8270CED5046}" dt="2025-10-21T09:36:23.861" v="67" actId="20577"/>
-        <pc:sldMkLst>
-          <pc:docMk/>
-          <pc:sldMk cId="2841943843" sldId="1468"/>
-        </pc:sldMkLst>
-        <pc:spChg chg="mod">
-          <ac:chgData name="Baráth, Július" userId="aebde9b9-dccc-4475-a9ac-c05e78323d7a" providerId="ADAL" clId="{4A0811C8-ED2F-505E-B787-C8270CED5046}" dt="2025-10-21T09:36:23.861" v="67" actId="20577"/>
-          <ac:spMkLst>
-            <pc:docMk/>
-            <pc:sldMk cId="2841943843" sldId="1468"/>
-            <ac:spMk id="6" creationId="{C1657137-F378-FF47-9E5E-8202B5FCADC2}"/>
-          </ac:spMkLst>
-        </pc:spChg>
-      </pc:sldChg>
-    </pc:docChg>
-  </pc:docChgLst>
-  <pc:docChgLst>
-    <pc:chgData name="Július Baráth" userId="e650c4ab-697e-4750-bd58-c1531aabce95" providerId="ADAL" clId="{7751DDD7-B624-3047-8080-5B488BBEECAD}"/>
-    <pc:docChg chg="delSld">
-      <pc:chgData name="Július Baráth" userId="e650c4ab-697e-4750-bd58-c1531aabce95" providerId="ADAL" clId="{7751DDD7-B624-3047-8080-5B488BBEECAD}" dt="2020-09-17T07:49:08.007" v="29" actId="2696"/>
-      <pc:docMkLst>
-        <pc:docMk/>
-      </pc:docMkLst>
-      <pc:sldChg chg="del">
-        <pc:chgData name="Július Baráth" userId="e650c4ab-697e-4750-bd58-c1531aabce95" providerId="ADAL" clId="{7751DDD7-B624-3047-8080-5B488BBEECAD}" dt="2020-09-17T06:41:41.944" v="0" actId="2696"/>
-        <pc:sldMkLst>
-          <pc:docMk/>
-          <pc:sldMk cId="343650477" sldId="513"/>
-        </pc:sldMkLst>
-      </pc:sldChg>
-      <pc:sldChg chg="del">
-        <pc:chgData name="Július Baráth" userId="e650c4ab-697e-4750-bd58-c1531aabce95" providerId="ADAL" clId="{7751DDD7-B624-3047-8080-5B488BBEECAD}" dt="2020-09-17T06:41:41.978" v="3" actId="2696"/>
-        <pc:sldMkLst>
-          <pc:docMk/>
-          <pc:sldMk cId="2145273728" sldId="763"/>
-        </pc:sldMkLst>
-      </pc:sldChg>
-      <pc:sldChg chg="del">
-        <pc:chgData name="Július Baráth" userId="e650c4ab-697e-4750-bd58-c1531aabce95" providerId="ADAL" clId="{7751DDD7-B624-3047-8080-5B488BBEECAD}" dt="2020-09-17T07:49:07.970" v="22" actId="2696"/>
-        <pc:sldMkLst>
-          <pc:docMk/>
-          <pc:sldMk cId="3271745509" sldId="874"/>
-        </pc:sldMkLst>
-      </pc:sldChg>
-      <pc:sldChg chg="del">
-        <pc:chgData name="Július Baráth" userId="e650c4ab-697e-4750-bd58-c1531aabce95" providerId="ADAL" clId="{7751DDD7-B624-3047-8080-5B488BBEECAD}" dt="2020-09-17T07:49:07.958" v="20" actId="2696"/>
-        <pc:sldMkLst>
-          <pc:docMk/>
-          <pc:sldMk cId="410599242" sldId="957"/>
-        </pc:sldMkLst>
-      </pc:sldChg>
-      <pc:sldChg chg="del">
-        <pc:chgData name="Július Baráth" userId="e650c4ab-697e-4750-bd58-c1531aabce95" providerId="ADAL" clId="{7751DDD7-B624-3047-8080-5B488BBEECAD}" dt="2020-09-17T06:41:41.956" v="1" actId="2696"/>
-        <pc:sldMkLst>
-          <pc:docMk/>
-          <pc:sldMk cId="2109317603" sldId="1052"/>
-        </pc:sldMkLst>
-      </pc:sldChg>
-      <pc:sldChg chg="del">
-        <pc:chgData name="Július Baráth" userId="e650c4ab-697e-4750-bd58-c1531aabce95" providerId="ADAL" clId="{7751DDD7-B624-3047-8080-5B488BBEECAD}" dt="2020-09-17T06:41:42.008" v="6" actId="2696"/>
-        <pc:sldMkLst>
-          <pc:docMk/>
-          <pc:sldMk cId="1129576059" sldId="1069"/>
-        </pc:sldMkLst>
-      </pc:sldChg>
-      <pc:sldChg chg="del">
-        <pc:chgData name="Július Baráth" userId="e650c4ab-697e-4750-bd58-c1531aabce95" providerId="ADAL" clId="{7751DDD7-B624-3047-8080-5B488BBEECAD}" dt="2020-09-17T06:41:41.988" v="4" actId="2696"/>
-        <pc:sldMkLst>
-          <pc:docMk/>
-          <pc:sldMk cId="1736058053" sldId="1071"/>
-        </pc:sldMkLst>
-      </pc:sldChg>
-      <pc:sldChg chg="del">
-        <pc:chgData name="Július Baráth" userId="e650c4ab-697e-4750-bd58-c1531aabce95" providerId="ADAL" clId="{7751DDD7-B624-3047-8080-5B488BBEECAD}" dt="2020-09-17T07:49:07.975" v="23" actId="2696"/>
-        <pc:sldMkLst>
-          <pc:docMk/>
-          <pc:sldMk cId="2929623157" sldId="1138"/>
-        </pc:sldMkLst>
-      </pc:sldChg>
-      <pc:sldChg chg="del">
-        <pc:chgData name="Július Baráth" userId="e650c4ab-697e-4750-bd58-c1531aabce95" providerId="ADAL" clId="{7751DDD7-B624-3047-8080-5B488BBEECAD}" dt="2020-09-17T06:41:42.020" v="7" actId="2696"/>
-        <pc:sldMkLst>
-          <pc:docMk/>
-          <pc:sldMk cId="2625469064" sldId="1209"/>
-        </pc:sldMkLst>
-      </pc:sldChg>
-      <pc:sldChg chg="del">
-        <pc:chgData name="Július Baráth" userId="e650c4ab-697e-4750-bd58-c1531aabce95" providerId="ADAL" clId="{7751DDD7-B624-3047-8080-5B488BBEECAD}" dt="2020-09-17T06:41:41.998" v="5" actId="2696"/>
-        <pc:sldMkLst>
-          <pc:docMk/>
-          <pc:sldMk cId="122153960" sldId="1272"/>
-        </pc:sldMkLst>
-      </pc:sldChg>
-      <pc:sldChg chg="del">
-        <pc:chgData name="Július Baráth" userId="e650c4ab-697e-4750-bd58-c1531aabce95" providerId="ADAL" clId="{7751DDD7-B624-3047-8080-5B488BBEECAD}" dt="2020-09-17T06:41:42.030" v="8" actId="2696"/>
-        <pc:sldMkLst>
-          <pc:docMk/>
-          <pc:sldMk cId="3054383092" sldId="1273"/>
-        </pc:sldMkLst>
-      </pc:sldChg>
-      <pc:sldChg chg="del">
-        <pc:chgData name="Július Baráth" userId="e650c4ab-697e-4750-bd58-c1531aabce95" providerId="ADAL" clId="{7751DDD7-B624-3047-8080-5B488BBEECAD}" dt="2020-09-17T07:49:08.001" v="28" actId="2696"/>
-        <pc:sldMkLst>
-          <pc:docMk/>
-          <pc:sldMk cId="2818667760" sldId="1357"/>
-        </pc:sldMkLst>
-      </pc:sldChg>
-      <pc:sldChg chg="del">
-        <pc:chgData name="Július Baráth" userId="e650c4ab-697e-4750-bd58-c1531aabce95" providerId="ADAL" clId="{7751DDD7-B624-3047-8080-5B488BBEECAD}" dt="2020-09-17T06:41:41.966" v="2" actId="2696"/>
-        <pc:sldMkLst>
-          <pc:docMk/>
-          <pc:sldMk cId="2383560749" sldId="1419"/>
-        </pc:sldMkLst>
-      </pc:sldChg>
-      <pc:sldChg chg="del">
-        <pc:chgData name="Július Baráth" userId="e650c4ab-697e-4750-bd58-c1531aabce95" providerId="ADAL" clId="{7751DDD7-B624-3047-8080-5B488BBEECAD}" dt="2020-09-17T07:12:01.873" v="18" actId="2696"/>
-        <pc:sldMkLst>
-          <pc:docMk/>
-          <pc:sldMk cId="1566475762" sldId="1421"/>
-        </pc:sldMkLst>
-      </pc:sldChg>
-      <pc:sldChg chg="del">
-        <pc:chgData name="Július Baráth" userId="e650c4ab-697e-4750-bd58-c1531aabce95" providerId="ADAL" clId="{7751DDD7-B624-3047-8080-5B488BBEECAD}" dt="2020-09-17T07:49:07.980" v="24" actId="2696"/>
-        <pc:sldMkLst>
-          <pc:docMk/>
-          <pc:sldMk cId="1662618756" sldId="1422"/>
-        </pc:sldMkLst>
-      </pc:sldChg>
-      <pc:sldChg chg="del">
-        <pc:chgData name="Július Baráth" userId="e650c4ab-697e-4750-bd58-c1531aabce95" providerId="ADAL" clId="{7751DDD7-B624-3047-8080-5B488BBEECAD}" dt="2020-09-17T06:42:54.397" v="10" actId="2696"/>
-        <pc:sldMkLst>
-          <pc:docMk/>
-          <pc:sldMk cId="898970306" sldId="1426"/>
-        </pc:sldMkLst>
-      </pc:sldChg>
-      <pc:sldChg chg="del">
-        <pc:chgData name="Július Baráth" userId="e650c4ab-697e-4750-bd58-c1531aabce95" providerId="ADAL" clId="{7751DDD7-B624-3047-8080-5B488BBEECAD}" dt="2020-09-17T06:44:59.986" v="11" actId="2696"/>
-        <pc:sldMkLst>
-          <pc:docMk/>
-          <pc:sldMk cId="738036756" sldId="1430"/>
-        </pc:sldMkLst>
-      </pc:sldChg>
-      <pc:sldChg chg="del">
-        <pc:chgData name="Július Baráth" userId="e650c4ab-697e-4750-bd58-c1531aabce95" providerId="ADAL" clId="{7751DDD7-B624-3047-8080-5B488BBEECAD}" dt="2020-09-17T06:50:07.455" v="12" actId="2696"/>
-        <pc:sldMkLst>
-          <pc:docMk/>
-          <pc:sldMk cId="772937172" sldId="1437"/>
-        </pc:sldMkLst>
-      </pc:sldChg>
-      <pc:sldChg chg="del">
-        <pc:chgData name="Július Baráth" userId="e650c4ab-697e-4750-bd58-c1531aabce95" providerId="ADAL" clId="{7751DDD7-B624-3047-8080-5B488BBEECAD}" dt="2020-09-17T06:52:21.782" v="13" actId="2696"/>
-        <pc:sldMkLst>
-          <pc:docMk/>
-          <pc:sldMk cId="3741709956" sldId="1448"/>
-        </pc:sldMkLst>
-      </pc:sldChg>
-      <pc:sldChg chg="del">
-        <pc:chgData name="Július Baráth" userId="e650c4ab-697e-4750-bd58-c1531aabce95" providerId="ADAL" clId="{7751DDD7-B624-3047-8080-5B488BBEECAD}" dt="2020-09-17T07:11:19.420" v="14" actId="2696"/>
-        <pc:sldMkLst>
-          <pc:docMk/>
-          <pc:sldMk cId="395585222" sldId="1469"/>
-        </pc:sldMkLst>
-      </pc:sldChg>
-      <pc:sldChg chg="del">
-        <pc:chgData name="Július Baráth" userId="e650c4ab-697e-4750-bd58-c1531aabce95" providerId="ADAL" clId="{7751DDD7-B624-3047-8080-5B488BBEECAD}" dt="2020-09-17T07:11:27.163" v="15" actId="2696"/>
-        <pc:sldMkLst>
-          <pc:docMk/>
-          <pc:sldMk cId="1877713000" sldId="1470"/>
-        </pc:sldMkLst>
-      </pc:sldChg>
-      <pc:sldChg chg="del">
-        <pc:chgData name="Július Baráth" userId="e650c4ab-697e-4750-bd58-c1531aabce95" providerId="ADAL" clId="{7751DDD7-B624-3047-8080-5B488BBEECAD}" dt="2020-09-17T07:11:45.205" v="16" actId="2696"/>
-        <pc:sldMkLst>
-          <pc:docMk/>
-          <pc:sldMk cId="1111577405" sldId="1471"/>
-        </pc:sldMkLst>
-      </pc:sldChg>
-      <pc:sldChg chg="del">
-        <pc:chgData name="Július Baráth" userId="e650c4ab-697e-4750-bd58-c1531aabce95" providerId="ADAL" clId="{7751DDD7-B624-3047-8080-5B488BBEECAD}" dt="2020-09-17T07:11:53.774" v="17" actId="2696"/>
-        <pc:sldMkLst>
-          <pc:docMk/>
-          <pc:sldMk cId="3167835692" sldId="1472"/>
-        </pc:sldMkLst>
-      </pc:sldChg>
-      <pc:sldChg chg="del">
-        <pc:chgData name="Július Baráth" userId="e650c4ab-697e-4750-bd58-c1531aabce95" providerId="ADAL" clId="{7751DDD7-B624-3047-8080-5B488BBEECAD}" dt="2020-09-17T07:48:46.314" v="19" actId="2696"/>
-        <pc:sldMkLst>
-          <pc:docMk/>
-          <pc:sldMk cId="3480456567" sldId="1477"/>
-        </pc:sldMkLst>
-      </pc:sldChg>
-      <pc:sldChg chg="del">
-        <pc:chgData name="Július Baráth" userId="e650c4ab-697e-4750-bd58-c1531aabce95" providerId="ADAL" clId="{7751DDD7-B624-3047-8080-5B488BBEECAD}" dt="2020-09-17T07:49:07.964" v="21" actId="2696"/>
-        <pc:sldMkLst>
-          <pc:docMk/>
-          <pc:sldMk cId="4109178071" sldId="1478"/>
-        </pc:sldMkLst>
-      </pc:sldChg>
-      <pc:sldChg chg="del">
-        <pc:chgData name="Július Baráth" userId="e650c4ab-697e-4750-bd58-c1531aabce95" providerId="ADAL" clId="{7751DDD7-B624-3047-8080-5B488BBEECAD}" dt="2020-09-17T07:49:07.985" v="25" actId="2696"/>
-        <pc:sldMkLst>
-          <pc:docMk/>
-          <pc:sldMk cId="3221690859" sldId="1479"/>
-        </pc:sldMkLst>
-      </pc:sldChg>
-      <pc:sldChg chg="del">
-        <pc:chgData name="Július Baráth" userId="e650c4ab-697e-4750-bd58-c1531aabce95" providerId="ADAL" clId="{7751DDD7-B624-3047-8080-5B488BBEECAD}" dt="2020-09-17T07:49:07.990" v="26" actId="2696"/>
-        <pc:sldMkLst>
-          <pc:docMk/>
-          <pc:sldMk cId="980694466" sldId="1480"/>
-        </pc:sldMkLst>
-      </pc:sldChg>
-      <pc:sldChg chg="del">
-        <pc:chgData name="Július Baráth" userId="e650c4ab-697e-4750-bd58-c1531aabce95" providerId="ADAL" clId="{7751DDD7-B624-3047-8080-5B488BBEECAD}" dt="2020-09-17T07:49:07.996" v="27" actId="2696"/>
-        <pc:sldMkLst>
-          <pc:docMk/>
-          <pc:sldMk cId="539528530" sldId="1481"/>
-        </pc:sldMkLst>
-      </pc:sldChg>
-      <pc:sldChg chg="del">
-        <pc:chgData name="Július Baráth" userId="e650c4ab-697e-4750-bd58-c1531aabce95" providerId="ADAL" clId="{7751DDD7-B624-3047-8080-5B488BBEECAD}" dt="2020-09-17T07:49:08.007" v="29" actId="2696"/>
-        <pc:sldMkLst>
-          <pc:docMk/>
-          <pc:sldMk cId="2326191926" sldId="1482"/>
-        </pc:sldMkLst>
-      </pc:sldChg>
-      <pc:sldChg chg="del">
-        <pc:chgData name="Július Baráth" userId="e650c4ab-697e-4750-bd58-c1531aabce95" providerId="ADAL" clId="{7751DDD7-B624-3047-8080-5B488BBEECAD}" dt="2020-09-17T06:41:42.041" v="9" actId="2696"/>
-        <pc:sldMkLst>
-          <pc:docMk/>
-          <pc:sldMk cId="3559046168" sldId="1483"/>
-        </pc:sldMkLst>
-      </pc:sldChg>
-    </pc:docChg>
-  </pc:docChgLst>
-  <pc:docChgLst>
-    <pc:chgData name="Július Baráth" userId="e650c4ab-697e-4750-bd58-c1531aabce95" providerId="ADAL" clId="{35BAB0F7-E4BD-0241-B4EA-E5670E1B8753}"/>
-    <pc:docChg chg="modSld">
-      <pc:chgData name="Július Baráth" userId="e650c4ab-697e-4750-bd58-c1531aabce95" providerId="ADAL" clId="{35BAB0F7-E4BD-0241-B4EA-E5670E1B8753}" dt="2020-11-23T12:52:44.789" v="0" actId="1076"/>
-      <pc:docMkLst>
-        <pc:docMk/>
-      </pc:docMkLst>
-      <pc:sldChg chg="modSp mod">
-        <pc:chgData name="Július Baráth" userId="e650c4ab-697e-4750-bd58-c1531aabce95" providerId="ADAL" clId="{35BAB0F7-E4BD-0241-B4EA-E5670E1B8753}" dt="2020-11-23T12:52:44.789" v="0" actId="1076"/>
-        <pc:sldMkLst>
-          <pc:docMk/>
-          <pc:sldMk cId="1729297283" sldId="1434"/>
-        </pc:sldMkLst>
-      </pc:sldChg>
-    </pc:docChg>
-  </pc:docChgLst>
-  <pc:docChgLst>
-    <pc:chgData name="Július Baráth" userId="e650c4ab-697e-4750-bd58-c1531aabce95" providerId="ADAL" clId="{E46AE5E0-EA0C-224D-8279-6263B568FA30}"/>
-    <pc:docChg chg="undo custSel addSld modSld">
-      <pc:chgData name="Július Baráth" userId="e650c4ab-697e-4750-bd58-c1531aabce95" providerId="ADAL" clId="{E46AE5E0-EA0C-224D-8279-6263B568FA30}" dt="2021-10-12T07:04:37.725" v="443" actId="113"/>
-      <pc:docMkLst>
-        <pc:docMk/>
-      </pc:docMkLst>
-      <pc:sldChg chg="addSp delSp modSp add mod chgLayout">
-        <pc:chgData name="Július Baráth" userId="e650c4ab-697e-4750-bd58-c1531aabce95" providerId="ADAL" clId="{E46AE5E0-EA0C-224D-8279-6263B568FA30}" dt="2021-10-12T06:24:30.930" v="442" actId="108"/>
-        <pc:sldMkLst>
-          <pc:docMk/>
-          <pc:sldMk cId="1073792699" sldId="342"/>
-        </pc:sldMkLst>
-      </pc:sldChg>
-      <pc:sldChg chg="modSp mod">
-        <pc:chgData name="Július Baráth" userId="e650c4ab-697e-4750-bd58-c1531aabce95" providerId="ADAL" clId="{E46AE5E0-EA0C-224D-8279-6263B568FA30}" dt="2021-10-05T08:21:41.526" v="5" actId="115"/>
-        <pc:sldMkLst>
-          <pc:docMk/>
-          <pc:sldMk cId="175850698" sldId="1187"/>
-        </pc:sldMkLst>
-      </pc:sldChg>
-      <pc:sldChg chg="addSp modSp mod">
-        <pc:chgData name="Július Baráth" userId="e650c4ab-697e-4750-bd58-c1531aabce95" providerId="ADAL" clId="{E46AE5E0-EA0C-224D-8279-6263B568FA30}" dt="2021-10-11T12:35:09.645" v="290" actId="20577"/>
-        <pc:sldMkLst>
-          <pc:docMk/>
-          <pc:sldMk cId="4215459012" sldId="1189"/>
-        </pc:sldMkLst>
-      </pc:sldChg>
-      <pc:sldChg chg="addSp modSp mod">
-        <pc:chgData name="Július Baráth" userId="e650c4ab-697e-4750-bd58-c1531aabce95" providerId="ADAL" clId="{E46AE5E0-EA0C-224D-8279-6263B568FA30}" dt="2021-10-05T09:24:04.180" v="94" actId="20577"/>
-        <pc:sldMkLst>
-          <pc:docMk/>
-          <pc:sldMk cId="262308121" sldId="1277"/>
-        </pc:sldMkLst>
-      </pc:sldChg>
-      <pc:sldChg chg="modSp mod">
-        <pc:chgData name="Július Baráth" userId="e650c4ab-697e-4750-bd58-c1531aabce95" providerId="ADAL" clId="{E46AE5E0-EA0C-224D-8279-6263B568FA30}" dt="2021-10-12T05:55:30.402" v="355" actId="20577"/>
-        <pc:sldMkLst>
-          <pc:docMk/>
-          <pc:sldMk cId="1331031089" sldId="1312"/>
-        </pc:sldMkLst>
-      </pc:sldChg>
-      <pc:sldChg chg="modSp mod">
-        <pc:chgData name="Július Baráth" userId="e650c4ab-697e-4750-bd58-c1531aabce95" providerId="ADAL" clId="{E46AE5E0-EA0C-224D-8279-6263B568FA30}" dt="2021-10-05T08:19:04.942" v="4" actId="14100"/>
-        <pc:sldMkLst>
-          <pc:docMk/>
-          <pc:sldMk cId="1741508343" sldId="1423"/>
-        </pc:sldMkLst>
-      </pc:sldChg>
-      <pc:sldChg chg="modSp mod">
-        <pc:chgData name="Július Baráth" userId="e650c4ab-697e-4750-bd58-c1531aabce95" providerId="ADAL" clId="{E46AE5E0-EA0C-224D-8279-6263B568FA30}" dt="2021-10-12T07:04:37.725" v="443" actId="113"/>
-        <pc:sldMkLst>
-          <pc:docMk/>
-          <pc:sldMk cId="3569245675" sldId="1431"/>
-        </pc:sldMkLst>
-      </pc:sldChg>
-      <pc:sldChg chg="modSp mod">
-        <pc:chgData name="Július Baráth" userId="e650c4ab-697e-4750-bd58-c1531aabce95" providerId="ADAL" clId="{E46AE5E0-EA0C-224D-8279-6263B568FA30}" dt="2021-10-11T12:16:11.911" v="192" actId="113"/>
-        <pc:sldMkLst>
-          <pc:docMk/>
-          <pc:sldMk cId="2381027414" sldId="1432"/>
-        </pc:sldMkLst>
-      </pc:sldChg>
-      <pc:sldChg chg="addSp modSp mod">
-        <pc:chgData name="Július Baráth" userId="e650c4ab-697e-4750-bd58-c1531aabce95" providerId="ADAL" clId="{E46AE5E0-EA0C-224D-8279-6263B568FA30}" dt="2021-10-05T08:32:30.736" v="15" actId="14100"/>
-        <pc:sldMkLst>
-          <pc:docMk/>
-          <pc:sldMk cId="818019005" sldId="1442"/>
-        </pc:sldMkLst>
-      </pc:sldChg>
-      <pc:sldChg chg="modSp mod">
-        <pc:chgData name="Július Baráth" userId="e650c4ab-697e-4750-bd58-c1531aabce95" providerId="ADAL" clId="{E46AE5E0-EA0C-224D-8279-6263B568FA30}" dt="2021-10-12T05:28:25.994" v="292" actId="113"/>
-        <pc:sldMkLst>
-          <pc:docMk/>
-          <pc:sldMk cId="771551237" sldId="1450"/>
-        </pc:sldMkLst>
-      </pc:sldChg>
-      <pc:sldChg chg="modSp mod">
-        <pc:chgData name="Július Baráth" userId="e650c4ab-697e-4750-bd58-c1531aabce95" providerId="ADAL" clId="{E46AE5E0-EA0C-224D-8279-6263B568FA30}" dt="2021-10-12T05:39:32.462" v="350" actId="20577"/>
-        <pc:sldMkLst>
-          <pc:docMk/>
-          <pc:sldMk cId="2204140661" sldId="1452"/>
-        </pc:sldMkLst>
-      </pc:sldChg>
-      <pc:sldChg chg="modSp mod">
-        <pc:chgData name="Július Baráth" userId="e650c4ab-697e-4750-bd58-c1531aabce95" providerId="ADAL" clId="{E46AE5E0-EA0C-224D-8279-6263B568FA30}" dt="2021-10-05T09:31:12.033" v="137" actId="14100"/>
-        <pc:sldMkLst>
-          <pc:docMk/>
-          <pc:sldMk cId="2052963645" sldId="1458"/>
-        </pc:sldMkLst>
-      </pc:sldChg>
-      <pc:sldChg chg="addSp delSp modSp mod">
-        <pc:chgData name="Július Baráth" userId="e650c4ab-697e-4750-bd58-c1531aabce95" providerId="ADAL" clId="{E46AE5E0-EA0C-224D-8279-6263B568FA30}" dt="2021-10-12T06:14:08.488" v="425" actId="20577"/>
-        <pc:sldMkLst>
-          <pc:docMk/>
-          <pc:sldMk cId="2522509168" sldId="1460"/>
-        </pc:sldMkLst>
-      </pc:sldChg>
-      <pc:sldChg chg="modSp mod">
-        <pc:chgData name="Július Baráth" userId="e650c4ab-697e-4750-bd58-c1531aabce95" providerId="ADAL" clId="{E46AE5E0-EA0C-224D-8279-6263B568FA30}" dt="2021-10-05T09:34:36.977" v="184" actId="20577"/>
-        <pc:sldMkLst>
-          <pc:docMk/>
-          <pc:sldMk cId="575168146" sldId="1466"/>
-        </pc:sldMkLst>
-      </pc:sldChg>
-      <pc:sldChg chg="addSp modSp new mod">
-        <pc:chgData name="Július Baráth" userId="e650c4ab-697e-4750-bd58-c1531aabce95" providerId="ADAL" clId="{E46AE5E0-EA0C-224D-8279-6263B568FA30}" dt="2021-10-11T12:27:37.301" v="265" actId="20577"/>
+        <pc:chgData name="Baráth, Július" userId="aebde9b9-dccc-4475-a9ac-c05e78323d7a" providerId="ADAL" clId="{4A0811C8-ED2F-505E-B787-C8270CED5046}" dt="2026-10-20T11:03:17.989" v="105" actId="114"/>
         <pc:sldMkLst>
           <pc:docMk/>
           <pc:sldMk cId="3518498273" sldId="1477"/>
         </pc:sldMkLst>
-      </pc:sldChg>
-    </pc:docChg>
-  </pc:docChgLst>
-  <pc:docChgLst>
-    <pc:chgData name="Július Baráth" userId="e650c4ab-697e-4750-bd58-c1531aabce95" providerId="ADAL" clId="{02124D7B-4BFE-1841-932F-428CD22834DC}"/>
-    <pc:docChg chg="custSel modSld">
-      <pc:chgData name="Július Baráth" userId="e650c4ab-697e-4750-bd58-c1531aabce95" providerId="ADAL" clId="{02124D7B-4BFE-1841-932F-428CD22834DC}" dt="2022-11-04T09:55:39.375" v="218" actId="20577"/>
-      <pc:docMkLst>
-        <pc:docMk/>
-      </pc:docMkLst>
-      <pc:sldChg chg="modSp mod">
-        <pc:chgData name="Július Baráth" userId="e650c4ab-697e-4750-bd58-c1531aabce95" providerId="ADAL" clId="{02124D7B-4BFE-1841-932F-428CD22834DC}" dt="2022-11-04T09:55:39.375" v="218" actId="20577"/>
-        <pc:sldMkLst>
-          <pc:docMk/>
-          <pc:sldMk cId="1073792699" sldId="342"/>
-        </pc:sldMkLst>
-      </pc:sldChg>
-      <pc:sldChg chg="addSp modSp mod">
-        <pc:chgData name="Július Baráth" userId="e650c4ab-697e-4750-bd58-c1531aabce95" providerId="ADAL" clId="{02124D7B-4BFE-1841-932F-428CD22834DC}" dt="2022-11-04T09:15:48.244" v="35" actId="20577"/>
-        <pc:sldMkLst>
-          <pc:docMk/>
-          <pc:sldMk cId="4215459012" sldId="1189"/>
-        </pc:sldMkLst>
-      </pc:sldChg>
-      <pc:sldChg chg="modSp mod">
-        <pc:chgData name="Július Baráth" userId="e650c4ab-697e-4750-bd58-c1531aabce95" providerId="ADAL" clId="{02124D7B-4BFE-1841-932F-428CD22834DC}" dt="2022-11-04T09:25:29.268" v="54" actId="20577"/>
-        <pc:sldMkLst>
-          <pc:docMk/>
-          <pc:sldMk cId="1069385919" sldId="1194"/>
-        </pc:sldMkLst>
-      </pc:sldChg>
-      <pc:sldChg chg="modSp mod">
-        <pc:chgData name="Július Baráth" userId="e650c4ab-697e-4750-bd58-c1531aabce95" providerId="ADAL" clId="{02124D7B-4BFE-1841-932F-428CD22834DC}" dt="2022-11-04T09:32:38.272" v="103" actId="113"/>
-        <pc:sldMkLst>
-          <pc:docMk/>
-          <pc:sldMk cId="262308121" sldId="1277"/>
-        </pc:sldMkLst>
-      </pc:sldChg>
-      <pc:sldChg chg="addSp modSp mod">
-        <pc:chgData name="Július Baráth" userId="e650c4ab-697e-4750-bd58-c1531aabce95" providerId="ADAL" clId="{02124D7B-4BFE-1841-932F-428CD22834DC}" dt="2022-11-04T09:31:47.715" v="102" actId="207"/>
-        <pc:sldMkLst>
-          <pc:docMk/>
-          <pc:sldMk cId="907753964" sldId="1446"/>
-        </pc:sldMkLst>
-      </pc:sldChg>
-      <pc:sldChg chg="addSp modSp mod">
-        <pc:chgData name="Július Baráth" userId="e650c4ab-697e-4750-bd58-c1531aabce95" providerId="ADAL" clId="{02124D7B-4BFE-1841-932F-428CD22834DC}" dt="2022-11-04T09:46:52.418" v="112" actId="14100"/>
-        <pc:sldMkLst>
-          <pc:docMk/>
-          <pc:sldMk cId="1492600851" sldId="1451"/>
-        </pc:sldMkLst>
-      </pc:sldChg>
-      <pc:sldChg chg="modSp mod">
-        <pc:chgData name="Július Baráth" userId="e650c4ab-697e-4750-bd58-c1531aabce95" providerId="ADAL" clId="{02124D7B-4BFE-1841-932F-428CD22834DC}" dt="2022-11-04T09:50:24.959" v="149" actId="14100"/>
-        <pc:sldMkLst>
-          <pc:docMk/>
-          <pc:sldMk cId="1254951745" sldId="1462"/>
-        </pc:sldMkLst>
-      </pc:sldChg>
-      <pc:sldChg chg="addSp delSp modSp mod chgLayout">
-        <pc:chgData name="Július Baráth" userId="e650c4ab-697e-4750-bd58-c1531aabce95" providerId="ADAL" clId="{02124D7B-4BFE-1841-932F-428CD22834DC}" dt="2022-11-04T09:23:28.830" v="46" actId="6549"/>
-        <pc:sldMkLst>
-          <pc:docMk/>
-          <pc:sldMk cId="3518498273" sldId="1477"/>
-        </pc:sldMkLst>
+        <pc:spChg chg="mod">
+          <ac:chgData name="Baráth, Július" userId="aebde9b9-dccc-4475-a9ac-c05e78323d7a" providerId="ADAL" clId="{4A0811C8-ED2F-505E-B787-C8270CED5046}" dt="2026-10-20T11:03:17.989" v="105" actId="114"/>
+          <ac:spMkLst>
+            <pc:docMk/>
+            <pc:sldMk cId="3518498273" sldId="1477"/>
+            <ac:spMk id="6" creationId="{50F40EF4-3533-A24E-8A93-6266D3D3F9D2}"/>
+          </ac:spMkLst>
+        </pc:spChg>
       </pc:sldChg>
     </pc:docChg>
   </pc:docChgLst>
@@ -1025,7 +394,7 @@
           <a:p>
             <a:fld id="{136337D9-3022-3D41-8D8A-BDF2F3B0DD8E}" type="datetimeFigureOut">
               <a:rPr lang="en-US" smtClean="0"/>
-              <a:t>10/22/25</a:t>
+              <a:t>10/20/26</a:t>
             </a:fld>
             <a:endParaRPr lang="en-US"/>
           </a:p>
@@ -6898,7 +6267,7 @@
       </p:grpSpPr>
       <p:sp>
         <p:nvSpPr>
-          <p:cNvPr id="2" name="Slide Image Placeholder 1"/>
+          <p:cNvPr id="2" name="Zástupný objekt pre obrázok snímky 1"/>
           <p:cNvSpPr>
             <a:spLocks noGrp="1" noRot="1" noChangeAspect="1"/>
           </p:cNvSpPr>
@@ -6910,7 +6279,7 @@
       </p:sp>
       <p:sp>
         <p:nvSpPr>
-          <p:cNvPr id="3" name="Notes Placeholder 2"/>
+          <p:cNvPr id="3" name="Zástupný objekt pre poznámky 2"/>
           <p:cNvSpPr>
             <a:spLocks noGrp="1"/>
           </p:cNvSpPr>
@@ -6923,27 +6292,18 @@
           <a:bodyPr/>
           <a:lstStyle/>
           <a:p>
-            <a:r>
-              <a:rPr lang="en-US"/>
-              <a:t>10 - Network Maintenance</a:t>
-            </a:r>
-          </a:p>
-          <a:p>
-            <a:r>
-              <a:rPr lang="en-US"/>
-              <a:t>10.7 - IOS Image Management</a:t>
-            </a:r>
+            <a:endParaRPr lang="sk-SK" dirty="0"/>
           </a:p>
         </p:txBody>
       </p:sp>
       <p:sp>
         <p:nvSpPr>
-          <p:cNvPr id="4" name="Slide Number Placeholder 3"/>
+          <p:cNvPr id="4" name="Zástupný objekt pre číslo snímky 3"/>
           <p:cNvSpPr>
             <a:spLocks noGrp="1"/>
           </p:cNvSpPr>
           <p:nvPr>
-            <p:ph type="sldNum" sz="quarter" idx="10"/>
+            <p:ph type="sldNum" sz="quarter" idx="5"/>
           </p:nvPr>
         </p:nvSpPr>
         <p:spPr/>
@@ -6953,7 +6313,7 @@
           <a:p>
             <a:fld id="{5641018C-6CAF-B84E-B92C-ECB119457FBA}" type="slidenum">
               <a:rPr lang="en-US" smtClean="0"/>
-              <a:t>63</a:t>
+              <a:t>62</a:t>
             </a:fld>
             <a:endParaRPr lang="en-US"/>
           </a:p>
@@ -6962,7 +6322,7 @@
     </p:spTree>
     <p:extLst>
       <p:ext uri="{BB962C8B-B14F-4D97-AF65-F5344CB8AC3E}">
-        <p14:creationId xmlns:p14="http://schemas.microsoft.com/office/powerpoint/2010/main" val="1874323299"/>
+        <p14:creationId xmlns:p14="http://schemas.microsoft.com/office/powerpoint/2010/main" val="1696775389"/>
       </p:ext>
     </p:extLst>
   </p:cSld>
@@ -7131,17 +6491,6 @@
               <a:t>10.7 - IOS Image Management</a:t>
             </a:r>
           </a:p>
-          <a:p>
-            <a:r>
-              <a:rPr lang="en-US"/>
-              <a:t>10.7.2 - </a:t>
-            </a:r>
-            <a:r>
-              <a:rPr lang="en-US" sz="1200"/>
-              <a:t>TFTP Servers as a Backup Location</a:t>
-            </a:r>
-            <a:endParaRPr lang="en-US"/>
-          </a:p>
         </p:txBody>
       </p:sp>
       <p:sp>
@@ -7151,7 +6500,7 @@
             <a:spLocks noGrp="1"/>
           </p:cNvSpPr>
           <p:nvPr>
-            <p:ph type="sldNum" sz="quarter" idx="5"/>
+            <p:ph type="sldNum" sz="quarter" idx="10"/>
           </p:nvPr>
         </p:nvSpPr>
         <p:spPr/>
@@ -7161,7 +6510,7 @@
           <a:p>
             <a:fld id="{5641018C-6CAF-B84E-B92C-ECB119457FBA}" type="slidenum">
               <a:rPr lang="en-US" smtClean="0"/>
-              <a:t>64</a:t>
+              <a:t>63</a:t>
             </a:fld>
             <a:endParaRPr lang="en-US"/>
           </a:p>
@@ -7170,7 +6519,7 @@
     </p:spTree>
     <p:extLst>
       <p:ext uri="{BB962C8B-B14F-4D97-AF65-F5344CB8AC3E}">
-        <p14:creationId xmlns:p14="http://schemas.microsoft.com/office/powerpoint/2010/main" val="3195810760"/>
+        <p14:creationId xmlns:p14="http://schemas.microsoft.com/office/powerpoint/2010/main" val="1874323299"/>
       </p:ext>
     </p:extLst>
   </p:cSld>
@@ -7238,11 +6587,11 @@
           <a:p>
             <a:r>
               <a:rPr lang="en-US"/>
-              <a:t>10.7.3 - </a:t>
+              <a:t>10.7.2 - </a:t>
             </a:r>
             <a:r>
               <a:rPr lang="en-US" sz="1200"/>
-              <a:t>Backup IOS Image to TFTP Server Example</a:t>
+              <a:t>TFTP Servers as a Backup Location</a:t>
             </a:r>
             <a:endParaRPr lang="en-US"/>
           </a:p>
@@ -7265,7 +6614,7 @@
           <a:p>
             <a:fld id="{5641018C-6CAF-B84E-B92C-ECB119457FBA}" type="slidenum">
               <a:rPr lang="en-US" smtClean="0"/>
-              <a:t>65</a:t>
+              <a:t>64</a:t>
             </a:fld>
             <a:endParaRPr lang="en-US"/>
           </a:p>
@@ -7274,7 +6623,7 @@
     </p:spTree>
     <p:extLst>
       <p:ext uri="{BB962C8B-B14F-4D97-AF65-F5344CB8AC3E}">
-        <p14:creationId xmlns:p14="http://schemas.microsoft.com/office/powerpoint/2010/main" val="3496792928"/>
+        <p14:creationId xmlns:p14="http://schemas.microsoft.com/office/powerpoint/2010/main" val="3195810760"/>
       </p:ext>
     </p:extLst>
   </p:cSld>
@@ -7342,11 +6691,11 @@
           <a:p>
             <a:r>
               <a:rPr lang="en-US"/>
-              <a:t>10.7.4 - </a:t>
+              <a:t>10.7.3 - </a:t>
             </a:r>
             <a:r>
               <a:rPr lang="en-US" sz="1200"/>
-              <a:t>Copy an IOS Image to a Device Example</a:t>
+              <a:t>Backup IOS Image to TFTP Server Example</a:t>
             </a:r>
             <a:endParaRPr lang="en-US"/>
           </a:p>
@@ -7369,7 +6718,7 @@
           <a:p>
             <a:fld id="{5641018C-6CAF-B84E-B92C-ECB119457FBA}" type="slidenum">
               <a:rPr lang="en-US" smtClean="0"/>
-              <a:t>66</a:t>
+              <a:t>65</a:t>
             </a:fld>
             <a:endParaRPr lang="en-US"/>
           </a:p>
@@ -7378,7 +6727,7 @@
     </p:spTree>
     <p:extLst>
       <p:ext uri="{BB962C8B-B14F-4D97-AF65-F5344CB8AC3E}">
-        <p14:creationId xmlns:p14="http://schemas.microsoft.com/office/powerpoint/2010/main" val="1709832696"/>
+        <p14:creationId xmlns:p14="http://schemas.microsoft.com/office/powerpoint/2010/main" val="3496792928"/>
       </p:ext>
     </p:extLst>
   </p:cSld>
@@ -7446,11 +6795,11 @@
           <a:p>
             <a:r>
               <a:rPr lang="en-US"/>
-              <a:t>10.7.5 -</a:t>
+              <a:t>10.7.4 - </a:t>
             </a:r>
             <a:r>
               <a:rPr lang="en-US" sz="1200"/>
-              <a:t>The boot system Command</a:t>
+              <a:t>Copy an IOS Image to a Device Example</a:t>
             </a:r>
             <a:endParaRPr lang="en-US"/>
           </a:p>
@@ -7473,6 +6822,110 @@
           <a:p>
             <a:fld id="{5641018C-6CAF-B84E-B92C-ECB119457FBA}" type="slidenum">
               <a:rPr lang="en-US" smtClean="0"/>
+              <a:t>66</a:t>
+            </a:fld>
+            <a:endParaRPr lang="en-US"/>
+          </a:p>
+        </p:txBody>
+      </p:sp>
+    </p:spTree>
+    <p:extLst>
+      <p:ext uri="{BB962C8B-B14F-4D97-AF65-F5344CB8AC3E}">
+        <p14:creationId xmlns:p14="http://schemas.microsoft.com/office/powerpoint/2010/main" val="1709832696"/>
+      </p:ext>
+    </p:extLst>
+  </p:cSld>
+  <p:clrMapOvr>
+    <a:masterClrMapping/>
+  </p:clrMapOvr>
+</p:notes>
+</file>
+
+<file path=ppt/notesSlides/notesSlide64.xml><?xml version="1.0" encoding="utf-8"?>
+<p:notes xmlns:a="http://schemas.openxmlformats.org/drawingml/2006/main" xmlns:r="http://schemas.openxmlformats.org/officeDocument/2006/relationships" xmlns:p="http://schemas.openxmlformats.org/presentationml/2006/main">
+  <p:cSld>
+    <p:spTree>
+      <p:nvGrpSpPr>
+        <p:cNvPr id="1" name=""/>
+        <p:cNvGrpSpPr/>
+        <p:nvPr/>
+      </p:nvGrpSpPr>
+      <p:grpSpPr>
+        <a:xfrm>
+          <a:off x="0" y="0"/>
+          <a:ext cx="0" cy="0"/>
+          <a:chOff x="0" y="0"/>
+          <a:chExt cx="0" cy="0"/>
+        </a:xfrm>
+      </p:grpSpPr>
+      <p:sp>
+        <p:nvSpPr>
+          <p:cNvPr id="2" name="Slide Image Placeholder 1"/>
+          <p:cNvSpPr>
+            <a:spLocks noGrp="1" noRot="1" noChangeAspect="1"/>
+          </p:cNvSpPr>
+          <p:nvPr>
+            <p:ph type="sldImg"/>
+          </p:nvPr>
+        </p:nvSpPr>
+        <p:spPr/>
+      </p:sp>
+      <p:sp>
+        <p:nvSpPr>
+          <p:cNvPr id="3" name="Notes Placeholder 2"/>
+          <p:cNvSpPr>
+            <a:spLocks noGrp="1"/>
+          </p:cNvSpPr>
+          <p:nvPr>
+            <p:ph type="body" idx="1"/>
+          </p:nvPr>
+        </p:nvSpPr>
+        <p:spPr/>
+        <p:txBody>
+          <a:bodyPr/>
+          <a:lstStyle/>
+          <a:p>
+            <a:r>
+              <a:rPr lang="en-US"/>
+              <a:t>10 - Network Maintenance</a:t>
+            </a:r>
+          </a:p>
+          <a:p>
+            <a:r>
+              <a:rPr lang="en-US"/>
+              <a:t>10.7 - IOS Image Management</a:t>
+            </a:r>
+          </a:p>
+          <a:p>
+            <a:r>
+              <a:rPr lang="en-US"/>
+              <a:t>10.7.5 -</a:t>
+            </a:r>
+            <a:r>
+              <a:rPr lang="en-US" sz="1200"/>
+              <a:t>The boot system Command</a:t>
+            </a:r>
+            <a:endParaRPr lang="en-US"/>
+          </a:p>
+        </p:txBody>
+      </p:sp>
+      <p:sp>
+        <p:nvSpPr>
+          <p:cNvPr id="4" name="Slide Number Placeholder 3"/>
+          <p:cNvSpPr>
+            <a:spLocks noGrp="1"/>
+          </p:cNvSpPr>
+          <p:nvPr>
+            <p:ph type="sldNum" sz="quarter" idx="5"/>
+          </p:nvPr>
+        </p:nvSpPr>
+        <p:spPr/>
+        <p:txBody>
+          <a:bodyPr/>
+          <a:lstStyle/>
+          <a:p>
+            <a:fld id="{5641018C-6CAF-B84E-B92C-ECB119457FBA}" type="slidenum">
+              <a:rPr lang="en-US" smtClean="0"/>
               <a:t>67</a:t>
             </a:fld>
             <a:endParaRPr lang="en-US"/>
@@ -7492,7 +6945,7 @@
 </p:notes>
 </file>
 
-<file path=ppt/notesSlides/notesSlide64.xml><?xml version="1.0" encoding="utf-8"?>
+<file path=ppt/notesSlides/notesSlide65.xml><?xml version="1.0" encoding="utf-8"?>
 <p:notes xmlns:a="http://schemas.openxmlformats.org/drawingml/2006/main" xmlns:r="http://schemas.openxmlformats.org/officeDocument/2006/relationships" xmlns:p="http://schemas.openxmlformats.org/presentationml/2006/main">
   <p:cSld>
     <p:spTree>
@@ -32500,7 +31953,7 @@
         <p:spPr>
           <a:xfrm>
             <a:off x="903514" y="3966238"/>
-            <a:ext cx="7336972" cy="646331"/>
+            <a:ext cx="7485000" cy="646331"/>
           </a:xfrm>
           <a:prstGeom prst="rect">
             <a:avLst/>
@@ -32530,22 +31983,59 @@
             </a:r>
             <a:r>
               <a:rPr lang="en-US" dirty="0"/>
+              <a:t> 1</a:t>
+            </a:r>
+          </a:p>
+          <a:p>
+            <a:r>
+              <a:rPr lang="sk-SK" dirty="0" err="1"/>
+              <a:t>clock</a:t>
+            </a:r>
+            <a:r>
+              <a:rPr lang="sk-SK" dirty="0"/>
               <a:t> </a:t>
             </a:r>
-          </a:p>
-          <a:p>
-            <a:r>
-              <a:rPr lang="en-US" dirty="0"/>
-              <a:t>clock summer-time </a:t>
+            <a:r>
+              <a:rPr lang="sk-SK" dirty="0" err="1"/>
+              <a:t>summer-time</a:t>
             </a:r>
             <a:r>
               <a:rPr lang="sk-SK" dirty="0"/>
-              <a:t>CEST</a:t>
-            </a:r>
-            <a:r>
-              <a:rPr lang="en-US" dirty="0"/>
-              <a:t> recurring 30 Sun Mar 2:00 26 Sun Oct 2:00</a:t>
-            </a:r>
+              <a:t> CEST </a:t>
+            </a:r>
+            <a:r>
+              <a:rPr lang="sk-SK" dirty="0" err="1"/>
+              <a:t>recurring</a:t>
+            </a:r>
+            <a:r>
+              <a:rPr lang="sk-SK" dirty="0"/>
+              <a:t> </a:t>
+            </a:r>
+            <a:r>
+              <a:rPr lang="sk-SK" dirty="0" err="1"/>
+              <a:t>last</a:t>
+            </a:r>
+            <a:r>
+              <a:rPr lang="sk-SK" dirty="0"/>
+              <a:t> Sun Mar 2:00 </a:t>
+            </a:r>
+            <a:r>
+              <a:rPr lang="sk-SK" dirty="0" err="1"/>
+              <a:t>last</a:t>
+            </a:r>
+            <a:r>
+              <a:rPr lang="sk-SK" dirty="0"/>
+              <a:t> Sun </a:t>
+            </a:r>
+            <a:r>
+              <a:rPr lang="sk-SK" dirty="0" err="1"/>
+              <a:t>Oct</a:t>
+            </a:r>
+            <a:r>
+              <a:rPr lang="sk-SK" dirty="0"/>
+              <a:t> 3:00</a:t>
+            </a:r>
+            <a:endParaRPr lang="en-US" dirty="0"/>
           </a:p>
         </p:txBody>
       </p:sp>
@@ -32583,65 +32073,6 @@
               <a:t>Time Zone &amp; Clock Changes in Bratislava, Slovakia (timeanddate.com)</a:t>
             </a:r>
             <a:endParaRPr lang="sk-SK" dirty="0"/>
-          </a:p>
-        </p:txBody>
-      </p:sp>
-      <p:sp>
-        <p:nvSpPr>
-          <p:cNvPr id="7" name="Obdĺžniková bublina 6">
-            <a:extLst>
-              <a:ext uri="{FF2B5EF4-FFF2-40B4-BE49-F238E27FC236}">
-                <a16:creationId xmlns:a16="http://schemas.microsoft.com/office/drawing/2014/main" id="{BB5FF13F-F2EE-0849-BE9C-C1EBD933CF4C}"/>
-              </a:ext>
-            </a:extLst>
-          </p:cNvPr>
-          <p:cNvSpPr/>
-          <p:nvPr/>
-        </p:nvSpPr>
-        <p:spPr>
-          <a:xfrm>
-            <a:off x="6316395" y="3822115"/>
-            <a:ext cx="2286000" cy="292685"/>
-          </a:xfrm>
-          <a:prstGeom prst="wedgeRectCallout">
-            <a:avLst>
-              <a:gd name="adj1" fmla="val -104166"/>
-              <a:gd name="adj2" fmla="val 117774"/>
-            </a:avLst>
-          </a:prstGeom>
-          <a:solidFill>
-            <a:srgbClr val="36A4D7"/>
-          </a:solidFill>
-          <a:ln>
-            <a:noFill/>
-          </a:ln>
-          <a:effectLst/>
-        </p:spPr>
-        <p:style>
-          <a:lnRef idx="2">
-            <a:schemeClr val="accent1">
-              <a:shade val="50000"/>
-            </a:schemeClr>
-          </a:lnRef>
-          <a:fillRef idx="1">
-            <a:schemeClr val="accent1"/>
-          </a:fillRef>
-          <a:effectRef idx="0">
-            <a:schemeClr val="accent1"/>
-          </a:effectRef>
-          <a:fontRef idx="minor">
-            <a:schemeClr val="lt1"/>
-          </a:fontRef>
-        </p:style>
-        <p:txBody>
-          <a:bodyPr rtlCol="0" anchor="ctr"/>
-          <a:lstStyle/>
-          <a:p>
-            <a:pPr algn="ctr"/>
-            <a:r>
-              <a:rPr lang="sk-SK" dirty="0"/>
-              <a:t>Platí pre rok 2025</a:t>
-            </a:r>
           </a:p>
         </p:txBody>
       </p:sp>
@@ -35632,7 +35063,7 @@
           <a:p>
             <a:pPr algn="l"/>
             <a:r>
-              <a:rPr lang="sk-SK">
+              <a:rPr lang="sk-SK" dirty="0">
                 <a:solidFill>
                   <a:schemeClr val="tx1"/>
                 </a:solidFill>
@@ -35640,7 +35071,7 @@
               <a:t>Router(</a:t>
             </a:r>
             <a:r>
-              <a:rPr lang="sk-SK" err="1">
+              <a:rPr lang="sk-SK" dirty="0" err="1">
                 <a:solidFill>
                   <a:schemeClr val="tx1"/>
                 </a:solidFill>
@@ -35648,7 +35079,7 @@
               <a:t>config</a:t>
             </a:r>
             <a:r>
-              <a:rPr lang="sk-SK">
+              <a:rPr lang="sk-SK" dirty="0">
                 <a:solidFill>
                   <a:schemeClr val="tx1"/>
                 </a:solidFill>
@@ -35656,7 +35087,7 @@
               <a:t>)#</a:t>
             </a:r>
             <a:r>
-              <a:rPr lang="sk-SK" b="1" err="1">
+              <a:rPr lang="sk-SK" b="1" dirty="0" err="1">
                 <a:solidFill>
                   <a:schemeClr val="tx1"/>
                 </a:solidFill>
@@ -35664,7 +35095,7 @@
               <a:t>clock</a:t>
             </a:r>
             <a:r>
-              <a:rPr lang="sk-SK" b="1">
+              <a:rPr lang="sk-SK" b="1" dirty="0">
                 <a:solidFill>
                   <a:schemeClr val="tx1"/>
                 </a:solidFill>
@@ -35672,7 +35103,7 @@
               <a:t> </a:t>
             </a:r>
             <a:r>
-              <a:rPr lang="sk-SK" b="1" err="1">
+              <a:rPr lang="sk-SK" b="1" dirty="0" err="1">
                 <a:solidFill>
                   <a:schemeClr val="tx1"/>
                 </a:solidFill>
@@ -35680,66 +35111,106 @@
               <a:t>timezone</a:t>
             </a:r>
             <a:r>
-              <a:rPr lang="sk-SK" b="1">
+              <a:rPr lang="sk-SK" b="1" dirty="0">
                 <a:solidFill>
                   <a:schemeClr val="tx1"/>
                 </a:solidFill>
               </a:rPr>
+              <a:t> CET</a:t>
+            </a:r>
+            <a:r>
+              <a:rPr lang="sk-SK" dirty="0">
+                <a:solidFill>
+                  <a:schemeClr val="tx1"/>
+                </a:solidFill>
+              </a:rPr>
               <a:t> </a:t>
             </a:r>
             <a:r>
-              <a:rPr lang="sk-SK" b="1" i="1">
+              <a:rPr lang="sk-SK" b="1" dirty="0">
                 <a:solidFill>
                   <a:schemeClr val="tx1"/>
                 </a:solidFill>
               </a:rPr>
-              <a:t>CET</a:t>
-            </a:r>
-            <a:r>
-              <a:rPr lang="sk-SK">
+              <a:t>1</a:t>
+            </a:r>
+          </a:p>
+          <a:p>
+            <a:pPr algn="l"/>
+            <a:r>
+              <a:rPr lang="sk-SK" dirty="0">
                 <a:solidFill>
                   <a:schemeClr val="tx1"/>
                 </a:solidFill>
               </a:rPr>
+              <a:t>Router(</a:t>
+            </a:r>
+            <a:r>
+              <a:rPr lang="sk-SK" dirty="0" err="1">
+                <a:solidFill>
+                  <a:schemeClr val="tx1"/>
+                </a:solidFill>
+              </a:rPr>
+              <a:t>config</a:t>
+            </a:r>
+            <a:r>
+              <a:rPr lang="sk-SK" dirty="0">
+                <a:solidFill>
+                  <a:schemeClr val="tx1"/>
+                </a:solidFill>
+              </a:rPr>
+              <a:t>)#</a:t>
+            </a:r>
+            <a:r>
+              <a:rPr lang="sk-SK" b="1" dirty="0" err="1">
+                <a:solidFill>
+                  <a:schemeClr val="tx1"/>
+                </a:solidFill>
+              </a:rPr>
+              <a:t>clock</a:t>
+            </a:r>
+            <a:r>
+              <a:rPr lang="sk-SK" b="1" dirty="0">
+                <a:solidFill>
+                  <a:schemeClr val="tx1"/>
+                </a:solidFill>
+              </a:rPr>
               <a:t> </a:t>
             </a:r>
-          </a:p>
-          <a:p>
-            <a:pPr algn="l"/>
-            <a:r>
-              <a:rPr lang="sk-SK">
+            <a:r>
+              <a:rPr lang="sk-SK" b="1" dirty="0" err="1">
                 <a:solidFill>
                   <a:schemeClr val="tx1"/>
                 </a:solidFill>
               </a:rPr>
-              <a:t>Router(</a:t>
-            </a:r>
-            <a:r>
-              <a:rPr lang="sk-SK" err="1">
+              <a:t>summer-time</a:t>
+            </a:r>
+            <a:r>
+              <a:rPr lang="sk-SK" b="1" dirty="0">
                 <a:solidFill>
                   <a:schemeClr val="tx1"/>
                 </a:solidFill>
               </a:rPr>
-              <a:t>config</a:t>
-            </a:r>
-            <a:r>
-              <a:rPr lang="sk-SK">
+              <a:t> CEST</a:t>
+            </a:r>
+            <a:r>
+              <a:rPr lang="sk-SK" dirty="0">
                 <a:solidFill>
                   <a:schemeClr val="tx1"/>
                 </a:solidFill>
               </a:rPr>
-              <a:t>)#</a:t>
-            </a:r>
-            <a:r>
-              <a:rPr lang="sk-SK" b="1" err="1">
+              <a:t> </a:t>
+            </a:r>
+            <a:r>
+              <a:rPr lang="sk-SK" b="1" dirty="0" err="1">
                 <a:solidFill>
                   <a:schemeClr val="tx1"/>
                 </a:solidFill>
               </a:rPr>
-              <a:t>clock</a:t>
-            </a:r>
-            <a:r>
-              <a:rPr lang="sk-SK" b="1">
+              <a:t>recurring</a:t>
+            </a:r>
+            <a:r>
+              <a:rPr lang="sk-SK" dirty="0">
                 <a:solidFill>
                   <a:schemeClr val="tx1"/>
                 </a:solidFill>
@@ -35747,62 +35218,14 @@
               <a:t> </a:t>
             </a:r>
             <a:r>
-              <a:rPr lang="sk-SK" b="1" err="1">
+              <a:rPr lang="en-US" b="1" dirty="0">
                 <a:solidFill>
                   <a:schemeClr val="tx1"/>
                 </a:solidFill>
               </a:rPr>
-              <a:t>summer-time</a:t>
-            </a:r>
-            <a:r>
-              <a:rPr lang="sk-SK" b="1">
-                <a:solidFill>
-                  <a:schemeClr val="tx1"/>
-                </a:solidFill>
-              </a:rPr>
-              <a:t> </a:t>
-            </a:r>
-            <a:r>
-              <a:rPr lang="sk-SK" b="1" i="1">
-                <a:solidFill>
-                  <a:schemeClr val="tx1"/>
-                </a:solidFill>
-              </a:rPr>
-              <a:t>CEST</a:t>
-            </a:r>
-            <a:r>
-              <a:rPr lang="sk-SK">
-                <a:solidFill>
-                  <a:schemeClr val="tx1"/>
-                </a:solidFill>
-              </a:rPr>
-              <a:t> </a:t>
-            </a:r>
-            <a:r>
-              <a:rPr lang="sk-SK" b="1" err="1">
-                <a:solidFill>
-                  <a:schemeClr val="tx1"/>
-                </a:solidFill>
-              </a:rPr>
-              <a:t>recurring</a:t>
-            </a:r>
-            <a:r>
-              <a:rPr lang="sk-SK">
-                <a:solidFill>
-                  <a:schemeClr val="tx1"/>
-                </a:solidFill>
-              </a:rPr>
-              <a:t> </a:t>
-            </a:r>
-            <a:r>
-              <a:rPr lang="en-US" b="1">
-                <a:solidFill>
-                  <a:schemeClr val="tx1"/>
-                </a:solidFill>
-              </a:rPr>
-              <a:t>27 Sun Mar 2:00 30 Sun Oct 2:00</a:t>
-            </a:r>
-            <a:endParaRPr lang="sk-SK" b="1">
+              <a:t>last Sun Mar 2:00 last Sun Oct 2:00</a:t>
+            </a:r>
+            <a:endParaRPr lang="sk-SK" b="1" dirty="0">
               <a:solidFill>
                 <a:schemeClr val="tx1"/>
               </a:solidFill>
@@ -35811,7 +35234,7 @@
           <a:p>
             <a:pPr algn="l"/>
             <a:r>
-              <a:rPr lang="sk-SK">
+              <a:rPr lang="sk-SK" dirty="0">
                 <a:solidFill>
                   <a:schemeClr val="tx1"/>
                 </a:solidFill>
@@ -35819,7 +35242,7 @@
               <a:t>Router(</a:t>
             </a:r>
             <a:r>
-              <a:rPr lang="sk-SK" err="1">
+              <a:rPr lang="sk-SK" dirty="0" err="1">
                 <a:solidFill>
                   <a:schemeClr val="tx1"/>
                 </a:solidFill>
@@ -35827,7 +35250,7 @@
               <a:t>config</a:t>
             </a:r>
             <a:r>
-              <a:rPr lang="sk-SK">
+              <a:rPr lang="sk-SK" dirty="0">
                 <a:solidFill>
                   <a:schemeClr val="tx1"/>
                 </a:solidFill>
@@ -35835,7 +35258,7 @@
               <a:t>)#</a:t>
             </a:r>
             <a:r>
-              <a:rPr lang="sk-SK" b="1" err="1">
+              <a:rPr lang="sk-SK" b="1" dirty="0" err="1">
                 <a:solidFill>
                   <a:schemeClr val="tx1"/>
                 </a:solidFill>
@@ -35843,7 +35266,7 @@
               <a:t>clock</a:t>
             </a:r>
             <a:r>
-              <a:rPr lang="sk-SK" b="1">
+              <a:rPr lang="sk-SK" b="1" dirty="0">
                 <a:solidFill>
                   <a:schemeClr val="tx1"/>
                 </a:solidFill>
@@ -35851,7 +35274,7 @@
               <a:t> </a:t>
             </a:r>
             <a:r>
-              <a:rPr lang="sk-SK" b="1" err="1">
+              <a:rPr lang="sk-SK" b="1" dirty="0" err="1">
                 <a:solidFill>
                   <a:schemeClr val="tx1"/>
                 </a:solidFill>
@@ -35859,7 +35282,7 @@
               <a:t>calendar-valid</a:t>
             </a:r>
             <a:r>
-              <a:rPr lang="sk-SK">
+              <a:rPr lang="sk-SK" dirty="0">
                 <a:solidFill>
                   <a:schemeClr val="tx1"/>
                 </a:solidFill>
@@ -35870,7 +35293,7 @@
           <a:p>
             <a:pPr algn="l"/>
             <a:r>
-              <a:rPr lang="sk-SK">
+              <a:rPr lang="sk-SK" dirty="0">
                 <a:solidFill>
                   <a:schemeClr val="tx1"/>
                 </a:solidFill>
@@ -35878,7 +35301,7 @@
               <a:t>Router(</a:t>
             </a:r>
             <a:r>
-              <a:rPr lang="sk-SK" err="1">
+              <a:rPr lang="sk-SK" dirty="0" err="1">
                 <a:solidFill>
                   <a:schemeClr val="tx1"/>
                 </a:solidFill>
@@ -35886,7 +35309,7 @@
               <a:t>config</a:t>
             </a:r>
             <a:r>
-              <a:rPr lang="sk-SK">
+              <a:rPr lang="sk-SK" dirty="0">
                 <a:solidFill>
                   <a:schemeClr val="tx1"/>
                 </a:solidFill>
@@ -35894,7 +35317,7 @@
               <a:t>)#</a:t>
             </a:r>
             <a:r>
-              <a:rPr lang="sk-SK" b="1" err="1">
+              <a:rPr lang="sk-SK" b="1" dirty="0" err="1">
                 <a:solidFill>
                   <a:schemeClr val="tx1"/>
                 </a:solidFill>
@@ -35902,7 +35325,7 @@
               <a:t>ntp</a:t>
             </a:r>
             <a:r>
-              <a:rPr lang="sk-SK" b="1">
+              <a:rPr lang="sk-SK" b="1" dirty="0">
                 <a:solidFill>
                   <a:schemeClr val="tx1"/>
                 </a:solidFill>
@@ -35910,7 +35333,7 @@
               <a:t> </a:t>
             </a:r>
             <a:r>
-              <a:rPr lang="sk-SK" b="1" err="1">
+              <a:rPr lang="sk-SK" b="1" dirty="0" err="1">
                 <a:solidFill>
                   <a:schemeClr val="tx1"/>
                 </a:solidFill>
@@ -35918,7 +35341,7 @@
               <a:t>master</a:t>
             </a:r>
             <a:r>
-              <a:rPr lang="sk-SK" b="1">
+              <a:rPr lang="sk-SK" b="1" dirty="0">
                 <a:solidFill>
                   <a:schemeClr val="tx1"/>
                 </a:solidFill>
@@ -35926,7 +35349,7 @@
               <a:t> </a:t>
             </a:r>
             <a:r>
-              <a:rPr lang="sk-SK" b="1" i="1">
+              <a:rPr lang="sk-SK" b="1" i="1" dirty="0">
                 <a:solidFill>
                   <a:schemeClr val="tx1"/>
                 </a:solidFill>
@@ -35934,7 +35357,7 @@
               <a:t>8</a:t>
             </a:r>
             <a:r>
-              <a:rPr lang="sk-SK">
+              <a:rPr lang="sk-SK" dirty="0">
                 <a:solidFill>
                   <a:schemeClr val="tx1"/>
                 </a:solidFill>
@@ -35945,7 +35368,7 @@
           <a:p>
             <a:pPr algn="l"/>
             <a:r>
-              <a:rPr lang="sk-SK">
+              <a:rPr lang="sk-SK" dirty="0">
                 <a:solidFill>
                   <a:schemeClr val="tx1"/>
                 </a:solidFill>
@@ -35953,7 +35376,7 @@
               <a:t>Router(</a:t>
             </a:r>
             <a:r>
-              <a:rPr lang="sk-SK" err="1">
+              <a:rPr lang="sk-SK" dirty="0" err="1">
                 <a:solidFill>
                   <a:schemeClr val="tx1"/>
                 </a:solidFill>
@@ -35961,7 +35384,7 @@
               <a:t>config</a:t>
             </a:r>
             <a:r>
-              <a:rPr lang="sk-SK">
+              <a:rPr lang="sk-SK" dirty="0">
                 <a:solidFill>
                   <a:schemeClr val="tx1"/>
                 </a:solidFill>
@@ -35969,7 +35392,7 @@
               <a:t>)#</a:t>
             </a:r>
             <a:r>
-              <a:rPr lang="sk-SK" b="1">
+              <a:rPr lang="sk-SK" b="1" dirty="0">
                 <a:solidFill>
                   <a:schemeClr val="tx1"/>
                 </a:solidFill>
@@ -35977,7 +35400,7 @@
               <a:t>end</a:t>
             </a:r>
             <a:r>
-              <a:rPr lang="sk-SK">
+              <a:rPr lang="sk-SK" dirty="0">
                 <a:solidFill>
                   <a:schemeClr val="tx1"/>
                 </a:solidFill>
@@ -35988,7 +35411,7 @@
           <a:p>
             <a:pPr algn="l"/>
             <a:r>
-              <a:rPr lang="sk-SK">
+              <a:rPr lang="sk-SK" dirty="0">
                 <a:solidFill>
                   <a:schemeClr val="tx1"/>
                 </a:solidFill>
@@ -35997,7 +35420,7 @@
             </a:r>
           </a:p>
           <a:p>
-            <a:endParaRPr lang="sk-SK"/>
+            <a:endParaRPr lang="sk-SK" dirty="0"/>
           </a:p>
         </p:txBody>
       </p:sp>
@@ -36028,7 +35451,7 @@
           <a:lstStyle/>
           <a:p>
             <a:r>
-              <a:rPr lang="sk-SK"/>
+              <a:rPr lang="sk-SK" dirty="0"/>
               <a:t>Router as NTP server</a:t>
             </a:r>
           </a:p>
@@ -38918,8 +38341,8 @@
           <a:chExt cx="0" cy="0"/>
         </a:xfrm>
       </p:grpSpPr>
-      <mc:AlternateContent xmlns:mc="http://schemas.openxmlformats.org/markup-compatibility/2006" xmlns:we="http://schemas.microsoft.com/office/webextensions/webextension/2010/11" xmlns:pca="http://schemas.microsoft.com/office/powerpoint/2013/contentapp">
-        <mc:Choice Requires="we pca">
+      <mc:AlternateContent xmlns:mc="http://schemas.openxmlformats.org/markup-compatibility/2006">
+        <mc:Choice xmlns:we="http://schemas.microsoft.com/office/webextensions/webextension/2010/11" xmlns:pca="http://schemas.microsoft.com/office/powerpoint/2013/contentapp" Requires="we pca">
           <p:graphicFrame>
             <p:nvGraphicFramePr>
               <p:cNvPr id="4" name="Zástupný objekt pre obsah 3">
@@ -38952,7 +38375,7 @@
             </a:graphic>
           </p:graphicFrame>
         </mc:Choice>
-        <mc:Fallback xmlns="">
+        <mc:Fallback>
           <p:pic>
             <p:nvPicPr>
               <p:cNvPr id="4" name="Zástupný objekt pre obsah 3">
@@ -49661,8 +49084,8 @@
           <a:chExt cx="0" cy="0"/>
         </a:xfrm>
       </p:grpSpPr>
-      <mc:AlternateContent xmlns:mc="http://schemas.openxmlformats.org/markup-compatibility/2006" xmlns:we="http://schemas.microsoft.com/office/webextensions/webextension/2010/11" xmlns:pca="http://schemas.microsoft.com/office/powerpoint/2013/contentapp">
-        <mc:Choice Requires="we pca">
+      <mc:AlternateContent xmlns:mc="http://schemas.openxmlformats.org/markup-compatibility/2006">
+        <mc:Choice xmlns:we="http://schemas.microsoft.com/office/webextensions/webextension/2010/11" xmlns:pca="http://schemas.microsoft.com/office/powerpoint/2013/contentapp" Requires="we pca">
           <p:graphicFrame>
             <p:nvGraphicFramePr>
               <p:cNvPr id="4" name="Zástupný objekt pre obsah 3">
@@ -49690,12 +49113,12 @@
             </p:xfrm>
             <a:graphic>
               <a:graphicData uri="http://schemas.microsoft.com/office/webextensions/webextension/2010/11">
-                <we:webextensionref xmlns:we="http://schemas.microsoft.com/office/webextensions/webextension/2010/11" xmlns:r="http://schemas.openxmlformats.org/officeDocument/2006/relationships" r:id="rId2"/>
+                <we:webextensionref xmlns:we="http://schemas.microsoft.com/office/webextensions/webextension/2010/11" xmlns:r="http://schemas.openxmlformats.org/officeDocument/2006/relationships" r:id="rId3"/>
               </a:graphicData>
             </a:graphic>
           </p:graphicFrame>
         </mc:Choice>
-        <mc:Fallback xmlns="">
+        <mc:Fallback>
           <p:pic>
             <p:nvPicPr>
               <p:cNvPr id="4" name="Zástupný objekt pre obsah 3">
@@ -49711,7 +49134,7 @@
               <p:nvPr/>
             </p:nvPicPr>
             <p:blipFill>
-              <a:blip r:embed="rId3"/>
+              <a:blip r:embed="rId4"/>
               <a:stretch>
                 <a:fillRect/>
               </a:stretch>
